--- a/REPORT/IOT BASED AIR QUALITY MONITORING SYSTEM.pptx
+++ b/REPORT/IOT BASED AIR QUALITY MONITORING SYSTEM.pptx
@@ -2974,7 +2974,12 @@
             <p:ph type="ctrTitle"/>
           </p:nvPr>
         </p:nvSpPr>
-        <p:spPr/>
+        <p:spPr>
+          <a:xfrm>
+            <a:off x="1524000" y="671259"/>
+            <a:ext cx="9144000" cy="2387600"/>
+          </a:xfrm>
+        </p:spPr>
         <p:txBody>
           <a:bodyPr/>
           <a:lstStyle/>
@@ -3003,22 +3008,29 @@
           <a:lstStyle/>
           <a:p>
             <a:r>
-              <a:rPr lang="en-US" dirty="0" smtClean="0"/>
+              <a:rPr lang="en-US" b="1" dirty="0" smtClean="0"/>
               <a:t>Presented by:</a:t>
             </a:r>
           </a:p>
           <a:p>
             <a:r>
-              <a:rPr lang="en-US" dirty="0" smtClean="0"/>
+              <a:rPr lang="en-US" b="1" dirty="0" smtClean="0"/>
               <a:t>1.JOSHUA WAMBUA-EG209/109705/22</a:t>
             </a:r>
           </a:p>
           <a:p>
             <a:r>
-              <a:rPr lang="en-US" smtClean="0"/>
-              <a:t>2.TABITHA NAISIAI-EG209/ /22</a:t>
-            </a:r>
-            <a:endParaRPr lang="en-US" dirty="0" smtClean="0"/>
+              <a:rPr lang="en-US" b="1" dirty="0" smtClean="0"/>
+              <a:t>2.TABITHA NAISIAI-EG209/ </a:t>
+            </a:r>
+            <a:r>
+              <a:rPr lang="en-US" b="1" dirty="0"/>
+              <a:t>109725</a:t>
+            </a:r>
+            <a:r>
+              <a:rPr lang="en-US" b="1" dirty="0" smtClean="0"/>
+              <a:t>/22</a:t>
+            </a:r>
           </a:p>
           <a:p>
             <a:endParaRPr lang="en-US" dirty="0"/>
